--- a/docs/final.pptx
+++ b/docs/final.pptx
@@ -6319,7 +6319,7 @@
             <a:pPr algn="l"/>
             <a:r>
               <a:rPr lang="en-IN" dirty="0"/>
-              <a:t>CHANDRA </a:t>
+              <a:t>CHANDRA MANIKANTA</a:t>
             </a:r>
             <a:endParaRPr dirty="0"/>
           </a:p>
@@ -7118,8 +7118,8 @@
         </p:blipFill>
         <p:spPr>
           <a:xfrm>
-            <a:off x="6587885" y="1011765"/>
-            <a:ext cx="2943992" cy="4546708"/>
+            <a:off x="4727524" y="768096"/>
+            <a:ext cx="6647611" cy="5038344"/>
           </a:xfrm>
           <a:prstGeom prst="rect">
             <a:avLst/>
